--- a/2. Smart_Inbox_Triage_Hackathon_Presentation.pptx
+++ b/2. Smart_Inbox_Triage_Hackathon_Presentation.pptx
@@ -10487,8 +10487,8 @@
         </p:nvSpPr>
         <p:spPr>
           <a:xfrm>
-            <a:off x="2381727" y="1937760"/>
-            <a:ext cx="5203276" cy="523220"/>
+            <a:off x="2257663" y="1955467"/>
+            <a:ext cx="7676673" cy="523220"/>
           </a:xfrm>
           <a:prstGeom prst="rect">
             <a:avLst/>
@@ -10518,7 +10518,7 @@
                   <a:schemeClr val="accent1"/>
                 </a:solidFill>
               </a:rPr>
-              <a:t>https://smart-inbox-</a:t>
+              <a:t>https://</a:t>
             </a:r>
             <a:r>
               <a:rPr lang="en-US" sz="1400" dirty="0" err="1">
@@ -10526,7 +10526,7 @@
                   <a:schemeClr val="accent1"/>
                 </a:solidFill>
               </a:rPr>
-              <a:t>triage.ai.studio</a:t>
+              <a:t>github.com</a:t>
             </a:r>
             <a:r>
               <a:rPr lang="en-US" sz="1400" dirty="0">
@@ -10535,6 +10535,38 @@
                 </a:solidFill>
               </a:rPr>
               <a:t>/</a:t>
+            </a:r>
+            <a:r>
+              <a:rPr lang="en-US" sz="1400" dirty="0" err="1">
+                <a:solidFill>
+                  <a:schemeClr val="accent1"/>
+                </a:solidFill>
+              </a:rPr>
+              <a:t>sdaistudio</a:t>
+            </a:r>
+            <a:r>
+              <a:rPr lang="en-US" sz="1400" dirty="0">
+                <a:solidFill>
+                  <a:schemeClr val="accent1"/>
+                </a:solidFill>
+              </a:rPr>
+              <a:t>/</a:t>
+            </a:r>
+            <a:r>
+              <a:rPr lang="en-US" sz="1400" dirty="0" err="1">
+                <a:solidFill>
+                  <a:schemeClr val="accent1"/>
+                </a:solidFill>
+              </a:rPr>
+              <a:t>xploreai</a:t>
+            </a:r>
+            <a:r>
+              <a:rPr lang="en-US" sz="1400" dirty="0">
+                <a:solidFill>
+                  <a:schemeClr val="accent1"/>
+                </a:solidFill>
+              </a:rPr>
+              <a:t>-site/blob/main/1.%20PRD.docx</a:t>
             </a:r>
           </a:p>
         </p:txBody>
@@ -10553,7 +10585,7 @@
         </p:nvSpPr>
         <p:spPr>
           <a:xfrm>
-            <a:off x="2381727" y="2983779"/>
+            <a:off x="2340161" y="4527724"/>
             <a:ext cx="5203276" cy="523220"/>
           </a:xfrm>
           <a:prstGeom prst="rect">
@@ -10614,7 +10646,7 @@
         </p:nvSpPr>
         <p:spPr>
           <a:xfrm>
-            <a:off x="5891958" y="3010342"/>
+            <a:off x="5850392" y="4554287"/>
             <a:ext cx="5203276" cy="523220"/>
           </a:xfrm>
           <a:prstGeom prst="rect">
@@ -10648,7 +10680,23 @@
                   <a:schemeClr val="accent1"/>
                 </a:solidFill>
               </a:rPr>
-              <a:t>https://triage-khral34zx-sdaistudios-projects.vercel.app/</a:t>
+              <a:t>https://triage-kappa-</a:t>
+            </a:r>
+            <a:r>
+              <a:rPr lang="en-US" sz="1400" dirty="0" err="1">
+                <a:solidFill>
+                  <a:schemeClr val="accent1"/>
+                </a:solidFill>
+              </a:rPr>
+              <a:t>one.vercel.app</a:t>
+            </a:r>
+            <a:r>
+              <a:rPr lang="en-US" sz="1400" dirty="0">
+                <a:solidFill>
+                  <a:schemeClr val="accent1"/>
+                </a:solidFill>
+              </a:rPr>
+              <a:t>/</a:t>
             </a:r>
           </a:p>
         </p:txBody>
@@ -10667,7 +10715,7 @@
         </p:nvSpPr>
         <p:spPr>
           <a:xfrm>
-            <a:off x="5344079" y="3071732"/>
+            <a:off x="5302513" y="4615677"/>
             <a:ext cx="431756" cy="307777"/>
           </a:xfrm>
           <a:prstGeom prst="rect">
@@ -10703,8 +10751,8 @@
         </p:nvSpPr>
         <p:spPr>
           <a:xfrm>
-            <a:off x="2381727" y="4056361"/>
-            <a:ext cx="5203276" cy="523220"/>
+            <a:off x="2318997" y="2905780"/>
+            <a:ext cx="10586512" cy="523220"/>
           </a:xfrm>
           <a:prstGeom prst="rect">
             <a:avLst/>
@@ -10729,7 +10777,7 @@
                   <a:schemeClr val="accent1"/>
                 </a:solidFill>
               </a:rPr>
-              <a:t>https://smart-inbox-</a:t>
+              <a:t>https://</a:t>
             </a:r>
             <a:r>
               <a:rPr lang="en-US" sz="1400" dirty="0" err="1">
@@ -10737,7 +10785,7 @@
                   <a:schemeClr val="accent1"/>
                 </a:solidFill>
               </a:rPr>
-              <a:t>triage.ai.studio</a:t>
+              <a:t>github.com</a:t>
             </a:r>
             <a:r>
               <a:rPr lang="en-US" sz="1400" dirty="0">
@@ -10746,6 +10794,38 @@
                 </a:solidFill>
               </a:rPr>
               <a:t>/</a:t>
+            </a:r>
+            <a:r>
+              <a:rPr lang="en-US" sz="1400" dirty="0" err="1">
+                <a:solidFill>
+                  <a:schemeClr val="accent1"/>
+                </a:solidFill>
+              </a:rPr>
+              <a:t>sdaistudio</a:t>
+            </a:r>
+            <a:r>
+              <a:rPr lang="en-US" sz="1400" dirty="0">
+                <a:solidFill>
+                  <a:schemeClr val="accent1"/>
+                </a:solidFill>
+              </a:rPr>
+              <a:t>/</a:t>
+            </a:r>
+            <a:r>
+              <a:rPr lang="en-US" sz="1400" dirty="0" err="1">
+                <a:solidFill>
+                  <a:schemeClr val="accent1"/>
+                </a:solidFill>
+              </a:rPr>
+              <a:t>xploreai</a:t>
+            </a:r>
+            <a:r>
+              <a:rPr lang="en-US" sz="1400" dirty="0">
+                <a:solidFill>
+                  <a:schemeClr val="accent1"/>
+                </a:solidFill>
+              </a:rPr>
+              <a:t>-site/blob/main/2.%20Smart_Inbox_Triage_Hackathon_Presentation.pptx</a:t>
             </a:r>
           </a:p>
         </p:txBody>
@@ -10764,7 +10844,7 @@
         </p:nvSpPr>
         <p:spPr>
           <a:xfrm>
-            <a:off x="2381727" y="4867333"/>
+            <a:off x="2318997" y="3716752"/>
             <a:ext cx="5203276" cy="523220"/>
           </a:xfrm>
           <a:prstGeom prst="rect">
@@ -10794,7 +10874,7 @@
                   <a:schemeClr val="accent1"/>
                 </a:solidFill>
               </a:rPr>
-              <a:t>https://smart-inbox-</a:t>
+              <a:t>https://</a:t>
             </a:r>
             <a:r>
               <a:rPr lang="en-US" sz="1400" dirty="0" err="1">
@@ -10802,7 +10882,7 @@
                   <a:schemeClr val="accent1"/>
                 </a:solidFill>
               </a:rPr>
-              <a:t>triage.ai.studio</a:t>
+              <a:t>github.com</a:t>
             </a:r>
             <a:r>
               <a:rPr lang="en-US" sz="1400" dirty="0">
@@ -10811,6 +10891,38 @@
                 </a:solidFill>
               </a:rPr>
               <a:t>/</a:t>
+            </a:r>
+            <a:r>
+              <a:rPr lang="en-US" sz="1400" dirty="0" err="1">
+                <a:solidFill>
+                  <a:schemeClr val="accent1"/>
+                </a:solidFill>
+              </a:rPr>
+              <a:t>sdaistudio</a:t>
+            </a:r>
+            <a:r>
+              <a:rPr lang="en-US" sz="1400" dirty="0">
+                <a:solidFill>
+                  <a:schemeClr val="accent1"/>
+                </a:solidFill>
+              </a:rPr>
+              <a:t>/</a:t>
+            </a:r>
+            <a:r>
+              <a:rPr lang="en-US" sz="1400" dirty="0" err="1">
+                <a:solidFill>
+                  <a:schemeClr val="accent1"/>
+                </a:solidFill>
+              </a:rPr>
+              <a:t>xploreai</a:t>
+            </a:r>
+            <a:r>
+              <a:rPr lang="en-US" sz="1400" dirty="0">
+                <a:solidFill>
+                  <a:schemeClr val="accent1"/>
+                </a:solidFill>
+              </a:rPr>
+              <a:t>-site</a:t>
             </a:r>
           </a:p>
         </p:txBody>
@@ -10829,7 +10941,7 @@
         </p:nvSpPr>
         <p:spPr>
           <a:xfrm>
-            <a:off x="1787235" y="1955467"/>
+            <a:off x="1756827" y="2032411"/>
             <a:ext cx="374073" cy="369332"/>
           </a:xfrm>
           <a:prstGeom prst="rect">
@@ -10864,7 +10976,7 @@
         </p:nvSpPr>
         <p:spPr>
           <a:xfrm>
-            <a:off x="1849966" y="3004167"/>
+            <a:off x="1808400" y="4548112"/>
             <a:ext cx="374073" cy="369332"/>
           </a:xfrm>
           <a:prstGeom prst="rect">
@@ -10880,7 +10992,7 @@
           <a:p>
             <a:r>
               <a:rPr lang="en-US" dirty="0"/>
-              <a:t>2</a:t>
+              <a:t>4</a:t>
             </a:r>
           </a:p>
         </p:txBody>
@@ -10899,7 +11011,7 @@
         </p:nvSpPr>
         <p:spPr>
           <a:xfrm>
-            <a:off x="1849965" y="4052867"/>
+            <a:off x="1808399" y="2982724"/>
             <a:ext cx="374073" cy="369332"/>
           </a:xfrm>
           <a:prstGeom prst="rect">
@@ -10915,7 +11027,7 @@
           <a:p>
             <a:r>
               <a:rPr lang="en-US" dirty="0"/>
-              <a:t>3</a:t>
+              <a:t>2</a:t>
             </a:r>
           </a:p>
         </p:txBody>
@@ -10934,7 +11046,7 @@
         </p:nvSpPr>
         <p:spPr>
           <a:xfrm>
-            <a:off x="1871130" y="4877330"/>
+            <a:off x="1808400" y="3726749"/>
             <a:ext cx="374073" cy="369332"/>
           </a:xfrm>
           <a:prstGeom prst="rect">
@@ -10950,7 +11062,7 @@
           <a:p>
             <a:r>
               <a:rPr lang="en-US" dirty="0"/>
-              <a:t>4</a:t>
+              <a:t>3</a:t>
             </a:r>
           </a:p>
         </p:txBody>
